--- a/public/fun/pack/pptx/family/가족소개_23_3대가족_여름낮잠.pptx
+++ b/public/fun/pack/pptx/family/가족소개_23_3대가족_여름낮잠.pptx
@@ -3347,7 +3347,7 @@
             <a:r>
               <a:rPr sz="3600" b="1" i="0">
                 <a:solidFill>
-                  <a:srgbClr val="314F22"/>
+                  <a:srgbClr val="115F41"/>
                 </a:solidFill>
               </a:rPr>
               <a:t>우리 가족을 소개합니다</a:t>
@@ -3385,7 +3385,7 @@
             <a:r>
               <a:rPr sz="1700" b="0" i="1">
                 <a:solidFill>
-                  <a:srgbClr val="314F22"/>
+                  <a:srgbClr val="115F41"/>
                 </a:solidFill>
               </a:rPr>
               <a:t>마루에서 삼대가 같이 낮잠</a:t>
@@ -3445,7 +3445,7 @@
     <p:bg>
       <p:bgPr>
         <a:solidFill>
-          <a:srgbClr val="F3F9F1"/>
+          <a:srgbClr val="EEFCF6"/>
         </a:solidFill>
         <a:effectLst/>
       </p:bgPr>
@@ -3472,7 +3472,7 @@
             <a:avLst/>
           </a:prstGeom>
           <a:solidFill>
-            <a:srgbClr val="5D9640"/>
+            <a:srgbClr val="26C588"/>
           </a:solidFill>
           <a:ln>
             <a:noFill/>
@@ -3501,7 +3501,7 @@
             <a:avLst/>
           </a:prstGeom>
           <a:solidFill>
-            <a:srgbClr val="4B3D8F"/>
+            <a:srgbClr val="209DB6"/>
           </a:solidFill>
           <a:ln>
             <a:noFill/>
@@ -3545,7 +3545,7 @@
             <a:r>
               <a:rPr sz="3000" b="1" i="0">
                 <a:solidFill>
-                  <a:srgbClr val="314F22"/>
+                  <a:srgbClr val="115F41"/>
                 </a:solidFill>
               </a:rPr>
               <a:t>가족 구성원</a:t>
@@ -3568,11 +3568,11 @@
             <a:avLst/>
           </a:prstGeom>
           <a:solidFill>
-            <a:srgbClr val="DCEED3"/>
+            <a:srgbClr val="D1FAEA"/>
           </a:solidFill>
           <a:ln w="19050">
             <a:solidFill>
-              <a:srgbClr val="5D9640"/>
+              <a:srgbClr val="26C588"/>
             </a:solidFill>
             <a:prstDash val="dash"/>
           </a:ln>
@@ -3591,7 +3591,7 @@
             <a:r>
               <a:rPr sz="1200" b="0" i="0">
                 <a:solidFill>
-                  <a:srgbClr val="314F22"/>
+                  <a:srgbClr val="115F41"/>
                 </a:solidFill>
               </a:rPr>
               <a:t>사진</a:t>
@@ -3629,7 +3629,7 @@
             <a:r>
               <a:rPr sz="1600" b="1" i="0">
                 <a:solidFill>
-                  <a:srgbClr val="314F22"/>
+                  <a:srgbClr val="115F41"/>
                 </a:solidFill>
               </a:rPr>
               <a:t>할아버지</a:t>
@@ -3720,11 +3720,11 @@
             <a:avLst/>
           </a:prstGeom>
           <a:solidFill>
-            <a:srgbClr val="DCEED3"/>
+            <a:srgbClr val="D1FAEA"/>
           </a:solidFill>
           <a:ln w="19050">
             <a:solidFill>
-              <a:srgbClr val="5D9640"/>
+              <a:srgbClr val="26C588"/>
             </a:solidFill>
             <a:prstDash val="dash"/>
           </a:ln>
@@ -3743,7 +3743,7 @@
             <a:r>
               <a:rPr sz="1200" b="0" i="0">
                 <a:solidFill>
-                  <a:srgbClr val="314F22"/>
+                  <a:srgbClr val="115F41"/>
                 </a:solidFill>
               </a:rPr>
               <a:t>사진</a:t>
@@ -3781,7 +3781,7 @@
             <a:r>
               <a:rPr sz="1600" b="1" i="0">
                 <a:solidFill>
-                  <a:srgbClr val="314F22"/>
+                  <a:srgbClr val="115F41"/>
                 </a:solidFill>
               </a:rPr>
               <a:t>할머니</a:t>
@@ -3872,11 +3872,11 @@
             <a:avLst/>
           </a:prstGeom>
           <a:solidFill>
-            <a:srgbClr val="DCEED3"/>
+            <a:srgbClr val="D1FAEA"/>
           </a:solidFill>
           <a:ln w="19050">
             <a:solidFill>
-              <a:srgbClr val="5D9640"/>
+              <a:srgbClr val="26C588"/>
             </a:solidFill>
             <a:prstDash val="dash"/>
           </a:ln>
@@ -3895,7 +3895,7 @@
             <a:r>
               <a:rPr sz="1200" b="0" i="0">
                 <a:solidFill>
-                  <a:srgbClr val="314F22"/>
+                  <a:srgbClr val="115F41"/>
                 </a:solidFill>
               </a:rPr>
               <a:t>사진</a:t>
@@ -3933,7 +3933,7 @@
             <a:r>
               <a:rPr sz="1600" b="1" i="0">
                 <a:solidFill>
-                  <a:srgbClr val="314F22"/>
+                  <a:srgbClr val="115F41"/>
                 </a:solidFill>
               </a:rPr>
               <a:t>아빠</a:t>
@@ -4024,11 +4024,11 @@
             <a:avLst/>
           </a:prstGeom>
           <a:solidFill>
-            <a:srgbClr val="DCEED3"/>
+            <a:srgbClr val="D1FAEA"/>
           </a:solidFill>
           <a:ln w="19050">
             <a:solidFill>
-              <a:srgbClr val="5D9640"/>
+              <a:srgbClr val="26C588"/>
             </a:solidFill>
             <a:prstDash val="dash"/>
           </a:ln>
@@ -4047,7 +4047,7 @@
             <a:r>
               <a:rPr sz="1200" b="0" i="0">
                 <a:solidFill>
-                  <a:srgbClr val="314F22"/>
+                  <a:srgbClr val="115F41"/>
                 </a:solidFill>
               </a:rPr>
               <a:t>사진</a:t>
@@ -4085,7 +4085,7 @@
             <a:r>
               <a:rPr sz="1600" b="1" i="0">
                 <a:solidFill>
-                  <a:srgbClr val="314F22"/>
+                  <a:srgbClr val="115F41"/>
                 </a:solidFill>
               </a:rPr>
               <a:t>엄마</a:t>
@@ -4176,11 +4176,11 @@
             <a:avLst/>
           </a:prstGeom>
           <a:solidFill>
-            <a:srgbClr val="DCEED3"/>
+            <a:srgbClr val="D1FAEA"/>
           </a:solidFill>
           <a:ln w="19050">
             <a:solidFill>
-              <a:srgbClr val="5D9640"/>
+              <a:srgbClr val="26C588"/>
             </a:solidFill>
             <a:prstDash val="dash"/>
           </a:ln>
@@ -4199,7 +4199,7 @@
             <a:r>
               <a:rPr sz="1200" b="0" i="0">
                 <a:solidFill>
-                  <a:srgbClr val="314F22"/>
+                  <a:srgbClr val="115F41"/>
                 </a:solidFill>
               </a:rPr>
               <a:t>사진</a:t>
@@ -4237,7 +4237,7 @@
             <a:r>
               <a:rPr sz="1600" b="1" i="0">
                 <a:solidFill>
-                  <a:srgbClr val="314F22"/>
+                  <a:srgbClr val="115F41"/>
                 </a:solidFill>
               </a:rPr>
               <a:t>큰아이</a:t>
@@ -4328,11 +4328,11 @@
             <a:avLst/>
           </a:prstGeom>
           <a:solidFill>
-            <a:srgbClr val="DCEED3"/>
+            <a:srgbClr val="D1FAEA"/>
           </a:solidFill>
           <a:ln w="19050">
             <a:solidFill>
-              <a:srgbClr val="5D9640"/>
+              <a:srgbClr val="26C588"/>
             </a:solidFill>
             <a:prstDash val="dash"/>
           </a:ln>
@@ -4351,7 +4351,7 @@
             <a:r>
               <a:rPr sz="1200" b="0" i="0">
                 <a:solidFill>
-                  <a:srgbClr val="314F22"/>
+                  <a:srgbClr val="115F41"/>
                 </a:solidFill>
               </a:rPr>
               <a:t>사진</a:t>
@@ -4389,7 +4389,7 @@
             <a:r>
               <a:rPr sz="1600" b="1" i="0">
                 <a:solidFill>
-                  <a:srgbClr val="314F22"/>
+                  <a:srgbClr val="115F41"/>
                 </a:solidFill>
               </a:rPr>
               <a:t>작은아이</a:t>
@@ -4479,7 +4479,7 @@
     <p:bg>
       <p:bgPr>
         <a:solidFill>
-          <a:srgbClr val="F3F9F1"/>
+          <a:srgbClr val="EEFCF6"/>
         </a:solidFill>
         <a:effectLst/>
       </p:bgPr>
@@ -4506,7 +4506,7 @@
             <a:avLst/>
           </a:prstGeom>
           <a:solidFill>
-            <a:srgbClr val="5D9640"/>
+            <a:srgbClr val="26C588"/>
           </a:solidFill>
           <a:ln>
             <a:noFill/>
@@ -4535,7 +4535,7 @@
             <a:avLst/>
           </a:prstGeom>
           <a:solidFill>
-            <a:srgbClr val="4B3D8F"/>
+            <a:srgbClr val="209DB6"/>
           </a:solidFill>
           <a:ln>
             <a:noFill/>
@@ -4579,7 +4579,7 @@
             <a:r>
               <a:rPr sz="3000" b="1" i="0">
                 <a:solidFill>
-                  <a:srgbClr val="314F22"/>
+                  <a:srgbClr val="115F41"/>
                 </a:solidFill>
               </a:rPr>
               <a:t>우리 가족 이야기</a:t>
@@ -4602,7 +4602,7 @@
             <a:avLst/>
           </a:prstGeom>
           <a:solidFill>
-            <a:srgbClr val="DCEED3"/>
+            <a:srgbClr val="D1FAEA"/>
           </a:solidFill>
           <a:ln>
             <a:noFill/>
@@ -4631,7 +4631,7 @@
             <a:avLst/>
           </a:prstGeom>
           <a:solidFill>
-            <a:srgbClr val="5D9640"/>
+            <a:srgbClr val="26C588"/>
           </a:solidFill>
           <a:ln w="38100">
             <a:solidFill>
@@ -4677,7 +4677,7 @@
             <a:r>
               <a:rPr sz="1600" b="1" i="0">
                 <a:solidFill>
-                  <a:srgbClr val="5D9640"/>
+                  <a:srgbClr val="26C588"/>
                 </a:solidFill>
               </a:rPr>
               <a:t>할아버지 할머니의 이야기</a:t>
@@ -4715,7 +4715,7 @@
             <a:r>
               <a:rPr sz="1800" b="1" i="0">
                 <a:solidFill>
-                  <a:srgbClr val="314F22"/>
+                  <a:srgbClr val="115F41"/>
                 </a:solidFill>
               </a:rPr>
               <a:t>뿌리</a:t>
@@ -4776,7 +4776,7 @@
             <a:avLst/>
           </a:prstGeom>
           <a:solidFill>
-            <a:srgbClr val="5D9640"/>
+            <a:srgbClr val="26C588"/>
           </a:solidFill>
           <a:ln w="38100">
             <a:solidFill>
@@ -4822,7 +4822,7 @@
             <a:r>
               <a:rPr sz="1600" b="1" i="0">
                 <a:solidFill>
-                  <a:srgbClr val="5D9640"/>
+                  <a:srgbClr val="26C588"/>
                 </a:solidFill>
               </a:rPr>
               <a:t>부모가 된 날</a:t>
@@ -4860,7 +4860,7 @@
             <a:r>
               <a:rPr sz="1800" b="1" i="0">
                 <a:solidFill>
-                  <a:srgbClr val="314F22"/>
+                  <a:srgbClr val="115F41"/>
                 </a:solidFill>
               </a:rPr>
               <a:t>새로운 가지</a:t>
@@ -4921,7 +4921,7 @@
             <a:avLst/>
           </a:prstGeom>
           <a:solidFill>
-            <a:srgbClr val="5D9640"/>
+            <a:srgbClr val="26C588"/>
           </a:solidFill>
           <a:ln w="38100">
             <a:solidFill>
@@ -4967,7 +4967,7 @@
             <a:r>
               <a:rPr sz="1600" b="1" i="0">
                 <a:solidFill>
-                  <a:srgbClr val="5D9640"/>
+                  <a:srgbClr val="26C588"/>
                 </a:solidFill>
               </a:rPr>
               <a:t>온 가족 모임</a:t>
@@ -5005,7 +5005,7 @@
             <a:r>
               <a:rPr sz="1800" b="1" i="0">
                 <a:solidFill>
-                  <a:srgbClr val="314F22"/>
+                  <a:srgbClr val="115F41"/>
                 </a:solidFill>
               </a:rPr>
               <a:t>한자리에 모인 날</a:t>
@@ -5066,7 +5066,7 @@
             <a:avLst/>
           </a:prstGeom>
           <a:solidFill>
-            <a:srgbClr val="5D9640"/>
+            <a:srgbClr val="26C588"/>
           </a:solidFill>
           <a:ln w="38100">
             <a:solidFill>
@@ -5112,7 +5112,7 @@
             <a:r>
               <a:rPr sz="1600" b="1" i="0">
                 <a:solidFill>
-                  <a:srgbClr val="5D9640"/>
+                  <a:srgbClr val="26C588"/>
                 </a:solidFill>
               </a:rPr>
               <a:t>지금</a:t>
@@ -5150,7 +5150,7 @@
             <a:r>
               <a:rPr sz="1800" b="1" i="0">
                 <a:solidFill>
-                  <a:srgbClr val="314F22"/>
+                  <a:srgbClr val="115F41"/>
                 </a:solidFill>
               </a:rPr>
               <a:t>오늘의 우리</a:t>
@@ -5210,7 +5210,7 @@
     <p:bg>
       <p:bgPr>
         <a:solidFill>
-          <a:srgbClr val="F3F9F1"/>
+          <a:srgbClr val="EEFCF6"/>
         </a:solidFill>
         <a:effectLst/>
       </p:bgPr>
@@ -5237,7 +5237,7 @@
             <a:avLst/>
           </a:prstGeom>
           <a:solidFill>
-            <a:srgbClr val="5D9640"/>
+            <a:srgbClr val="26C588"/>
           </a:solidFill>
           <a:ln>
             <a:noFill/>
@@ -5266,7 +5266,7 @@
             <a:avLst/>
           </a:prstGeom>
           <a:solidFill>
-            <a:srgbClr val="4B3D8F"/>
+            <a:srgbClr val="209DB6"/>
           </a:solidFill>
           <a:ln>
             <a:noFill/>
@@ -5310,7 +5310,7 @@
             <a:r>
               <a:rPr sz="3000" b="1" i="0">
                 <a:solidFill>
-                  <a:srgbClr val="314F22"/>
+                  <a:srgbClr val="115F41"/>
                 </a:solidFill>
               </a:rPr>
               <a:t>우리 가족의 약속</a:t>
@@ -5335,11 +5335,11 @@
             </a:avLst>
           </a:prstGeom>
           <a:solidFill>
-            <a:srgbClr val="F3F9F1"/>
+            <a:srgbClr val="EEFCF6"/>
           </a:solidFill>
           <a:ln w="12700">
             <a:solidFill>
-              <a:srgbClr val="DCEED3"/>
+              <a:srgbClr val="D1FAEA"/>
             </a:solidFill>
           </a:ln>
         </p:spPr>
@@ -5366,7 +5366,7 @@
             <a:avLst/>
           </a:prstGeom>
           <a:solidFill>
-            <a:srgbClr val="5D9640"/>
+            <a:srgbClr val="26C588"/>
           </a:solidFill>
           <a:ln>
             <a:noFill/>
@@ -5424,7 +5424,7 @@
             <a:r>
               <a:rPr sz="1800" b="1" i="0">
                 <a:solidFill>
-                  <a:srgbClr val="314F22"/>
+                  <a:srgbClr val="115F41"/>
                 </a:solidFill>
               </a:rPr>
               <a:t>약속 1</a:t>
@@ -5487,11 +5487,11 @@
             </a:avLst>
           </a:prstGeom>
           <a:solidFill>
-            <a:srgbClr val="F3F9F1"/>
+            <a:srgbClr val="EEFCF6"/>
           </a:solidFill>
           <a:ln w="12700">
             <a:solidFill>
-              <a:srgbClr val="DCEED3"/>
+              <a:srgbClr val="D1FAEA"/>
             </a:solidFill>
           </a:ln>
         </p:spPr>
@@ -5518,7 +5518,7 @@
             <a:avLst/>
           </a:prstGeom>
           <a:solidFill>
-            <a:srgbClr val="5D9640"/>
+            <a:srgbClr val="26C588"/>
           </a:solidFill>
           <a:ln>
             <a:noFill/>
@@ -5576,7 +5576,7 @@
             <a:r>
               <a:rPr sz="1800" b="1" i="0">
                 <a:solidFill>
-                  <a:srgbClr val="314F22"/>
+                  <a:srgbClr val="115F41"/>
                 </a:solidFill>
               </a:rPr>
               <a:t>약속 2</a:t>
@@ -5639,11 +5639,11 @@
             </a:avLst>
           </a:prstGeom>
           <a:solidFill>
-            <a:srgbClr val="F3F9F1"/>
+            <a:srgbClr val="EEFCF6"/>
           </a:solidFill>
           <a:ln w="12700">
             <a:solidFill>
-              <a:srgbClr val="DCEED3"/>
+              <a:srgbClr val="D1FAEA"/>
             </a:solidFill>
           </a:ln>
         </p:spPr>
@@ -5670,7 +5670,7 @@
             <a:avLst/>
           </a:prstGeom>
           <a:solidFill>
-            <a:srgbClr val="5D9640"/>
+            <a:srgbClr val="26C588"/>
           </a:solidFill>
           <a:ln>
             <a:noFill/>
@@ -5728,7 +5728,7 @@
             <a:r>
               <a:rPr sz="1800" b="1" i="0">
                 <a:solidFill>
-                  <a:srgbClr val="314F22"/>
+                  <a:srgbClr val="115F41"/>
                 </a:solidFill>
               </a:rPr>
               <a:t>약속 3</a:t>
@@ -5788,7 +5788,7 @@
     <p:bg>
       <p:bgPr>
         <a:solidFill>
-          <a:srgbClr val="F3F9F1"/>
+          <a:srgbClr val="EEFCF6"/>
         </a:solidFill>
         <a:effectLst/>
       </p:bgPr>
@@ -5815,7 +5815,7 @@
             <a:avLst/>
           </a:prstGeom>
           <a:solidFill>
-            <a:srgbClr val="5D9640"/>
+            <a:srgbClr val="26C588"/>
           </a:solidFill>
           <a:ln>
             <a:noFill/>
@@ -5844,7 +5844,7 @@
             <a:avLst/>
           </a:prstGeom>
           <a:solidFill>
-            <a:srgbClr val="4B3D8F"/>
+            <a:srgbClr val="209DB6"/>
           </a:solidFill>
           <a:ln>
             <a:noFill/>
@@ -5888,7 +5888,7 @@
             <a:r>
               <a:rPr sz="3000" b="1" i="0">
                 <a:solidFill>
-                  <a:srgbClr val="314F22"/>
+                  <a:srgbClr val="115F41"/>
                 </a:solidFill>
               </a:rPr>
               <a:t>가족 사진</a:t>
@@ -5913,11 +5913,11 @@
             </a:avLst>
           </a:prstGeom>
           <a:solidFill>
-            <a:srgbClr val="DCEED3"/>
+            <a:srgbClr val="D1FAEA"/>
           </a:solidFill>
           <a:ln w="19050">
             <a:solidFill>
-              <a:srgbClr val="5D9640"/>
+              <a:srgbClr val="26C588"/>
             </a:solidFill>
             <a:prstDash val="dash"/>
           </a:ln>
@@ -5936,7 +5936,7 @@
             <a:r>
               <a:rPr sz="1200" b="0" i="0">
                 <a:solidFill>
-                  <a:srgbClr val="314F22"/>
+                  <a:srgbClr val="115F41"/>
                 </a:solidFill>
               </a:rPr>
               <a:t>사진 1</a:t>
@@ -5961,11 +5961,11 @@
             </a:avLst>
           </a:prstGeom>
           <a:solidFill>
-            <a:srgbClr val="DCEED3"/>
+            <a:srgbClr val="D1FAEA"/>
           </a:solidFill>
           <a:ln w="19050">
             <a:solidFill>
-              <a:srgbClr val="5D9640"/>
+              <a:srgbClr val="26C588"/>
             </a:solidFill>
             <a:prstDash val="dash"/>
           </a:ln>
@@ -5984,7 +5984,7 @@
             <a:r>
               <a:rPr sz="1200" b="0" i="0">
                 <a:solidFill>
-                  <a:srgbClr val="314F22"/>
+                  <a:srgbClr val="115F41"/>
                 </a:solidFill>
               </a:rPr>
               <a:t>사진 2</a:t>
@@ -6009,11 +6009,11 @@
             </a:avLst>
           </a:prstGeom>
           <a:solidFill>
-            <a:srgbClr val="DCEED3"/>
+            <a:srgbClr val="D1FAEA"/>
           </a:solidFill>
           <a:ln w="19050">
             <a:solidFill>
-              <a:srgbClr val="5D9640"/>
+              <a:srgbClr val="26C588"/>
             </a:solidFill>
             <a:prstDash val="dash"/>
           </a:ln>
@@ -6032,7 +6032,7 @@
             <a:r>
               <a:rPr sz="1200" b="0" i="0">
                 <a:solidFill>
-                  <a:srgbClr val="314F22"/>
+                  <a:srgbClr val="115F41"/>
                 </a:solidFill>
               </a:rPr>
               <a:t>사진 3</a:t>
@@ -6057,11 +6057,11 @@
             </a:avLst>
           </a:prstGeom>
           <a:solidFill>
-            <a:srgbClr val="DCEED3"/>
+            <a:srgbClr val="D1FAEA"/>
           </a:solidFill>
           <a:ln w="19050">
             <a:solidFill>
-              <a:srgbClr val="5D9640"/>
+              <a:srgbClr val="26C588"/>
             </a:solidFill>
             <a:prstDash val="dash"/>
           </a:ln>
@@ -6080,7 +6080,7 @@
             <a:r>
               <a:rPr sz="1200" b="0" i="0">
                 <a:solidFill>
-                  <a:srgbClr val="314F22"/>
+                  <a:srgbClr val="115F41"/>
                 </a:solidFill>
               </a:rPr>
               <a:t>사진 4</a:t>
@@ -6105,11 +6105,11 @@
             </a:avLst>
           </a:prstGeom>
           <a:solidFill>
-            <a:srgbClr val="DCEED3"/>
+            <a:srgbClr val="D1FAEA"/>
           </a:solidFill>
           <a:ln w="19050">
             <a:solidFill>
-              <a:srgbClr val="5D9640"/>
+              <a:srgbClr val="26C588"/>
             </a:solidFill>
             <a:prstDash val="dash"/>
           </a:ln>
@@ -6128,7 +6128,7 @@
             <a:r>
               <a:rPr sz="1200" b="0" i="0">
                 <a:solidFill>
-                  <a:srgbClr val="314F22"/>
+                  <a:srgbClr val="115F41"/>
                 </a:solidFill>
               </a:rPr>
               <a:t>사진 5</a:t>
@@ -6153,11 +6153,11 @@
             </a:avLst>
           </a:prstGeom>
           <a:solidFill>
-            <a:srgbClr val="DCEED3"/>
+            <a:srgbClr val="D1FAEA"/>
           </a:solidFill>
           <a:ln w="19050">
             <a:solidFill>
-              <a:srgbClr val="5D9640"/>
+              <a:srgbClr val="26C588"/>
             </a:solidFill>
             <a:prstDash val="dash"/>
           </a:ln>
@@ -6176,7 +6176,7 @@
             <a:r>
               <a:rPr sz="1200" b="0" i="0">
                 <a:solidFill>
-                  <a:srgbClr val="314F22"/>
+                  <a:srgbClr val="115F41"/>
                 </a:solidFill>
               </a:rPr>
               <a:t>사진 6</a:t>
@@ -6256,7 +6256,7 @@
             <a:r>
               <a:rPr sz="3600" b="1" i="0">
                 <a:solidFill>
-                  <a:srgbClr val="314F22"/>
+                  <a:srgbClr val="115F41"/>
                 </a:solidFill>
               </a:rPr>
               <a:t>우리 가족 소개를 마칩니다</a:t>
@@ -6294,7 +6294,7 @@
             <a:r>
               <a:rPr sz="1700" b="0" i="1">
                 <a:solidFill>
-                  <a:srgbClr val="314F22"/>
+                  <a:srgbClr val="115F41"/>
                 </a:solidFill>
               </a:rPr>
               <a:t>읽어 주셔서 고맙습니다</a:t>
@@ -6359,34 +6359,34 @@
         <a:sysClr val="window" lastClr="FFFFFF"/>
       </a:lt1>
       <a:dk2>
-        <a:srgbClr val="314F22"/>
+        <a:srgbClr val="115F41"/>
       </a:dk2>
       <a:lt2>
-        <a:srgbClr val="F3F9F1"/>
+        <a:srgbClr val="EEFCF6"/>
       </a:lt2>
       <a:accent1>
-        <a:srgbClr val="5D9640"/>
+        <a:srgbClr val="26C588"/>
       </a:accent1>
       <a:accent2>
-        <a:srgbClr val="4B3D8F"/>
+        <a:srgbClr val="209DB6"/>
       </a:accent2>
       <a:accent3>
-        <a:srgbClr val="314F22"/>
+        <a:srgbClr val="115F41"/>
       </a:accent3>
       <a:accent4>
-        <a:srgbClr val="DCEED3"/>
+        <a:srgbClr val="D1FAEA"/>
       </a:accent4>
       <a:accent5>
-        <a:srgbClr val="546A68"/>
+        <a:srgbClr val="23B19F"/>
       </a:accent5>
       <a:accent6>
-        <a:srgbClr val="83957A"/>
+        <a:srgbClr val="709F8D"/>
       </a:accent6>
       <a:hlink>
-        <a:srgbClr val="5D9640"/>
+        <a:srgbClr val="26C588"/>
       </a:hlink>
       <a:folHlink>
-        <a:srgbClr val="314F22"/>
+        <a:srgbClr val="115F41"/>
       </a:folHlink>
     </a:clrScheme>
     <a:fontScheme name="Office">
